--- a/assets/pptx/catalog-466.pptx
+++ b/assets/pptx/catalog-466.pptx
@@ -3248,7 +3248,7 @@
                 <a:ea typeface="Ebrima"/>
                 <a:cs typeface="Ebrima"/>
               </a:rPr>
-              <a:t>"(ሃሌሉያ) ሉዑል ሆይ ማደሪያህ እንደምን የተወደዱ ናቸው</a:t>
+              <a:t>"ሃሌሉያ ሉዑል ሆይ ማደሪያህ እንደምን የተወደዱ ናቸው</a:t>
             </a:r>
           </a:p>
           <a:p>
@@ -3266,7 +3266,7 @@
                 <a:ea typeface="Ebrima"/>
                 <a:cs typeface="Ebrima"/>
               </a:rPr>
-              <a:t>(ሃሌሉያ) እናመሰግንሃለን (ሃሌሉያ) (3x) ማደሪያህ ውብ ነው (ሃሌሉያ) (4x)"</a:t>
+              <a:t>ሃሌሉያ እናመሰግንሃለን ሃሌሉያ 3x ማደሪያህ ውብ ነው ሃሌሉያ 4x"</a:t>
             </a:r>
           </a:p>
         </p:txBody>
@@ -3333,7 +3333,7 @@
                 <a:ea typeface="Ebrima"/>
                 <a:cs typeface="Ebrima"/>
               </a:rPr>
-              <a:t>- ማደሪያህ እንዴት ያማረ ነው (2x)</a:t>
+              <a:t>- ማደሪያህ እንዴት ያማረ ነው 2x</a:t>
             </a:r>
           </a:p>
           <a:p>
@@ -3351,7 +3351,7 @@
                 <a:ea typeface="Ebrima"/>
                 <a:cs typeface="Ebrima"/>
               </a:rPr>
-              <a:t>መንፈስህ እንዴት ያማረ ነው (8x)</a:t>
+              <a:t>መንፈስህ እንዴት ያማረ ነው 8x</a:t>
             </a:r>
           </a:p>
         </p:txBody>
@@ -3472,7 +3472,7 @@
                 <a:ea typeface="Ebrima"/>
                 <a:cs typeface="Ebrima"/>
               </a:rPr>
-              <a:t>ስደርስበት ሁሉንም እንዳለኝ ነው (2x)</a:t>
+              <a:t>ስደርስበት ሁሉንም እንዳለኝ ነው 2x</a:t>
             </a:r>
           </a:p>
         </p:txBody>
@@ -3539,7 +3539,7 @@
                 <a:ea typeface="Ebrima"/>
                 <a:cs typeface="Ebrima"/>
               </a:rPr>
-              <a:t>- ማደሪያህ እንዴት ያማረ ነው (2x)</a:t>
+              <a:t>- ማደሪያህ እንዴት ያማረ ነው 2x</a:t>
             </a:r>
           </a:p>
           <a:p>
@@ -3557,7 +3557,7 @@
                 <a:ea typeface="Ebrima"/>
                 <a:cs typeface="Ebrima"/>
               </a:rPr>
-              <a:t>መንፈስህ እንዴት ያማረ ነው (8x)</a:t>
+              <a:t>መንፈስህ እንዴት ያማረ ነው 8x</a:t>
             </a:r>
           </a:p>
         </p:txBody>
@@ -3781,7 +3781,7 @@
                 <a:ea typeface="Ebrima"/>
                 <a:cs typeface="Ebrima"/>
               </a:rPr>
-              <a:t>በአደባባይ እወደዋለሁ ይላል ቆሞ (2x)</a:t>
+              <a:t>በአደባባይ እወደዋለሁ ይላል ቆሞ 2x</a:t>
             </a:r>
           </a:p>
         </p:txBody>
@@ -4023,7 +4023,7 @@
                 <a:ea typeface="Ebrima"/>
                 <a:cs typeface="Ebrima"/>
               </a:rPr>
-              <a:t>ማደሪያዬ ቅድስተ ቅዱሳን (8x)</a:t>
+              <a:t>ማደሪያዬ ቅድስተ ቅዱሳን 8x</a:t>
             </a:r>
           </a:p>
         </p:txBody>
